--- a/media/resources/files/Onduktar_Boluu_KondumB_OvLbWOu.pptx
+++ b/media/resources/files/Onduktar_Boluu_KondumB_OvLbWOu.pptx
@@ -4717,7 +4717,7 @@
           <a:p>
             <a:r>
               <a:rPr lang="en-GB" sz="1400" dirty="0"/>
-              <a:t>1.2 ÷ 0.6 =</a:t>
+              <a:t>1,2 ÷ 0,6 =</a:t>
             </a:r>
           </a:p>
         </p:txBody>
@@ -4942,7 +4942,7 @@
             </a:r>
             <a:r>
               <a:rPr lang="en-GB" sz="1400" dirty="0"/>
-              <a:t>)  6.5 ÷ 0.5 =</a:t>
+              <a:t>)  6,5 ÷ 0,5 =</a:t>
             </a:r>
           </a:p>
         </p:txBody>
@@ -5044,7 +5044,7 @@
             </a:r>
             <a:r>
               <a:rPr lang="en-GB" sz="1400" dirty="0"/>
-              <a:t>)  6.4 ÷ 0.4 =</a:t>
+              <a:t>)  6,4 ÷ 0,4 =</a:t>
             </a:r>
           </a:p>
         </p:txBody>
@@ -5146,7 +5146,7 @@
             </a:r>
             <a:r>
               <a:rPr lang="en-GB" sz="1400" dirty="0"/>
-              <a:t>)  9.6 ÷ 0.3 =</a:t>
+              <a:t>)  9,6 ÷ 0,3 =</a:t>
             </a:r>
           </a:p>
         </p:txBody>
@@ -5248,7 +5248,7 @@
             </a:r>
             <a:r>
               <a:rPr lang="en-GB" sz="1400" dirty="0"/>
-              <a:t>)  9.6 ÷ 0.4 =</a:t>
+              <a:t>)  9,6 ÷ 0,4 =</a:t>
             </a:r>
           </a:p>
         </p:txBody>
@@ -5287,7 +5287,7 @@
             </a:r>
             <a:r>
               <a:rPr lang="en-GB" sz="1400" dirty="0"/>
-              <a:t>)  2.7 ÷ 0.3 =</a:t>
+              <a:t>)  2,7 ÷ 0,3 =</a:t>
             </a:r>
           </a:p>
         </p:txBody>
@@ -5389,7 +5389,7 @@
             </a:r>
             <a:r>
               <a:rPr lang="en-GB" sz="1400" dirty="0"/>
-              <a:t>)  8.4 ÷ 1.2 =</a:t>
+              <a:t>)  8,4 ÷ 1,2 =</a:t>
             </a:r>
           </a:p>
         </p:txBody>
@@ -5428,7 +5428,7 @@
             </a:r>
             <a:r>
               <a:rPr lang="en-GB" sz="1400" dirty="0"/>
-              <a:t>)  6.5 ÷ 1.3 =</a:t>
+              <a:t>)  6,5 ÷ 1,3 =</a:t>
             </a:r>
           </a:p>
         </p:txBody>
@@ -5467,7 +5467,7 @@
             </a:r>
             <a:r>
               <a:rPr lang="en-GB" sz="1400" dirty="0"/>
-              <a:t>)  6.8 ÷ 1.7 =</a:t>
+              <a:t>)  6,8 ÷ 1,7 =</a:t>
             </a:r>
           </a:p>
         </p:txBody>
@@ -5506,7 +5506,7 @@
             </a:r>
             <a:r>
               <a:rPr lang="en-GB" sz="1400" dirty="0"/>
-              <a:t>)  9.6 ÷ 3.2 =</a:t>
+              <a:t>)  9,6 ÷ 3,2 =</a:t>
             </a:r>
           </a:p>
         </p:txBody>
@@ -5545,7 +5545,7 @@
             </a:r>
             <a:r>
               <a:rPr lang="en-GB" sz="1400" dirty="0"/>
-              <a:t>)  3.6 ÷ 1.2 =</a:t>
+              <a:t>)  3,6 ÷ 1,2 =</a:t>
             </a:r>
           </a:p>
         </p:txBody>
@@ -5666,7 +5666,7 @@
             </a:r>
             <a:r>
               <a:rPr lang="en-GB" sz="1400" dirty="0"/>
-              <a:t>)  1.4 ÷ 0.7 =</a:t>
+              <a:t>)  1,4 ÷ 0,7 =</a:t>
             </a:r>
           </a:p>
         </p:txBody>
@@ -5705,7 +5705,7 @@
             </a:r>
             <a:r>
               <a:rPr lang="en-GB" sz="1400" dirty="0"/>
-              <a:t>)  1.8 ÷ 0.3 =</a:t>
+              <a:t>)  1,8 ÷ 0,3 =</a:t>
             </a:r>
           </a:p>
         </p:txBody>
@@ -5744,7 +5744,7 @@
             </a:r>
             <a:r>
               <a:rPr lang="en-GB" sz="1400" dirty="0"/>
-              <a:t>)  1.5 ÷ 0.1 =</a:t>
+              <a:t>)  1,5 ÷ 0,1 =</a:t>
             </a:r>
           </a:p>
         </p:txBody>
@@ -5846,7 +5846,7 @@
             </a:r>
             <a:r>
               <a:rPr lang="en-GB" sz="1400" dirty="0"/>
-              <a:t>)  4 ÷ 0.8 =</a:t>
+              <a:t>)  4 ÷ 0,8 =</a:t>
             </a:r>
           </a:p>
         </p:txBody>
@@ -6238,7 +6238,7 @@
             </a:r>
             <a:r>
               <a:rPr lang="en-GB" sz="1400" dirty="0"/>
-              <a:t>)  0.98 ÷ 0.07 =</a:t>
+              <a:t>)  0,98 ÷ 0,07 =</a:t>
             </a:r>
           </a:p>
         </p:txBody>
@@ -6277,7 +6277,7 @@
             </a:r>
             <a:r>
               <a:rPr lang="en-GB" sz="1400" dirty="0"/>
-              <a:t>)  7.8 ÷ 0.06 =</a:t>
+              <a:t>)  7,8 ÷ 0,06 =</a:t>
             </a:r>
           </a:p>
         </p:txBody>
@@ -6316,7 +6316,7 @@
             </a:r>
             <a:r>
               <a:rPr lang="en-GB" sz="1400" dirty="0"/>
-              <a:t>)  3 ÷ 0.12 =</a:t>
+              <a:t>)  3 ÷ 0,12 =</a:t>
             </a:r>
           </a:p>
         </p:txBody>
@@ -6355,7 +6355,7 @@
             </a:r>
             <a:r>
               <a:rPr lang="en-GB" sz="1400" dirty="0"/>
-              <a:t>)  6.48 ÷ 0.27 =</a:t>
+              <a:t>)  6,48 ÷ 0,27 =</a:t>
             </a:r>
           </a:p>
         </p:txBody>
@@ -6394,7 +6394,7 @@
             </a:r>
             <a:r>
               <a:rPr lang="en-GB" sz="1400" dirty="0"/>
-              <a:t>)  4 ÷ 0.02 =</a:t>
+              <a:t>)  4 ÷ 0,02 =</a:t>
             </a:r>
           </a:p>
         </p:txBody>
@@ -6571,7 +6571,7 @@
           <a:p>
             <a:r>
               <a:rPr lang="en-GB" sz="1400" dirty="0"/>
-              <a:t>1.2 ÷ 0.6 =</a:t>
+              <a:t>1,2 ÷ 0,6 =</a:t>
             </a:r>
           </a:p>
         </p:txBody>
@@ -6839,7 +6839,7 @@
             </a:r>
             <a:r>
               <a:rPr lang="en-GB" sz="1400" dirty="0"/>
-              <a:t>)  6.5 ÷ 0.5 =</a:t>
+              <a:t>)  6,5 ÷ 0,5 =</a:t>
             </a:r>
           </a:p>
         </p:txBody>
@@ -7019,7 +7019,7 @@
             </a:r>
             <a:r>
               <a:rPr lang="en-GB" sz="1400" dirty="0"/>
-              <a:t>)  6.4 ÷ 0.4 =</a:t>
+              <a:t>)  6,4 ÷ 0,4 =</a:t>
             </a:r>
           </a:p>
         </p:txBody>
@@ -7199,7 +7199,7 @@
             </a:r>
             <a:r>
               <a:rPr lang="en-GB" sz="1400" dirty="0"/>
-              <a:t>)  9.6 ÷ 0.3 =</a:t>
+              <a:t>)  9,6 ÷ 0,3 =</a:t>
             </a:r>
           </a:p>
         </p:txBody>
@@ -7379,7 +7379,7 @@
             </a:r>
             <a:r>
               <a:rPr lang="en-GB" sz="1400" dirty="0"/>
-              <a:t>)  9.6 ÷ 0.4 =</a:t>
+              <a:t>)  9,6 ÷ 0,4 =</a:t>
             </a:r>
           </a:p>
         </p:txBody>
@@ -7557,7 +7557,7 @@
             </a:r>
             <a:r>
               <a:rPr lang="en-GB" sz="1400" dirty="0"/>
-              <a:t>)  2.7 ÷ 0.3 =</a:t>
+              <a:t>)  2,7 ÷ 0,3 =</a:t>
             </a:r>
           </a:p>
         </p:txBody>
@@ -7737,7 +7737,7 @@
             </a:r>
             <a:r>
               <a:rPr lang="en-GB" sz="1400" dirty="0"/>
-              <a:t>)  8.4 ÷ 1.2 =</a:t>
+              <a:t>)  8,4 ÷ 1,2 =</a:t>
             </a:r>
           </a:p>
         </p:txBody>
@@ -7915,7 +7915,7 @@
             </a:r>
             <a:r>
               <a:rPr lang="en-GB" sz="1400" dirty="0"/>
-              <a:t>)  6.5 ÷ 1.3 =</a:t>
+              <a:t>)  6,5 ÷ 1,3 =</a:t>
             </a:r>
           </a:p>
         </p:txBody>
@@ -8093,7 +8093,7 @@
             </a:r>
             <a:r>
               <a:rPr lang="en-GB" sz="1400" dirty="0"/>
-              <a:t>)  6.8 ÷ 1.7 =</a:t>
+              <a:t>)  6,8 ÷ 1,7 =</a:t>
             </a:r>
           </a:p>
         </p:txBody>
@@ -8271,7 +8271,7 @@
             </a:r>
             <a:r>
               <a:rPr lang="en-GB" sz="1400" dirty="0"/>
-              <a:t>)  9.6 ÷ 3.2 =</a:t>
+              <a:t>)  9,6 ÷ 3,2 =</a:t>
             </a:r>
           </a:p>
         </p:txBody>
@@ -8449,7 +8449,7 @@
             </a:r>
             <a:r>
               <a:rPr lang="en-GB" sz="1400" dirty="0"/>
-              <a:t>)  3.6 ÷ 1.2 =</a:t>
+              <a:t>)  3,6 ÷ 1,2 =</a:t>
             </a:r>
           </a:p>
         </p:txBody>
@@ -8709,7 +8709,7 @@
             </a:r>
             <a:r>
               <a:rPr lang="en-GB" sz="1400" dirty="0"/>
-              <a:t>)  1.4 ÷ 0.7 =</a:t>
+              <a:t>)  1,4 ÷ 0,7 =</a:t>
             </a:r>
           </a:p>
         </p:txBody>
@@ -8826,7 +8826,7 @@
             </a:r>
             <a:r>
               <a:rPr lang="en-GB" sz="1400" dirty="0"/>
-              <a:t>)  1.8 ÷ 0.3 =</a:t>
+              <a:t>)  1,8 ÷ 0,3 =</a:t>
             </a:r>
           </a:p>
         </p:txBody>
@@ -8943,7 +8943,7 @@
             </a:r>
             <a:r>
               <a:rPr lang="en-GB" sz="1400" dirty="0"/>
-              <a:t>)  1.5 ÷ 0.1 =</a:t>
+              <a:t>)  1,5 ÷ 0,1 =</a:t>
             </a:r>
           </a:p>
         </p:txBody>
@@ -9123,7 +9123,7 @@
             </a:r>
             <a:r>
               <a:rPr lang="en-GB" sz="1400" dirty="0"/>
-              <a:t>)  4 ÷ 0.8 =</a:t>
+              <a:t>)  4 ÷ 0,8 =</a:t>
             </a:r>
           </a:p>
         </p:txBody>
@@ -9593,7 +9593,7 @@
             </a:r>
             <a:r>
               <a:rPr lang="en-GB" sz="1400" dirty="0"/>
-              <a:t>)  0.98 ÷ 0.07 =</a:t>
+              <a:t>)  0,98 ÷ 0,07 =</a:t>
             </a:r>
           </a:p>
         </p:txBody>
@@ -9771,7 +9771,7 @@
             </a:r>
             <a:r>
               <a:rPr lang="en-GB" sz="1400" dirty="0"/>
-              <a:t>)  7.8 ÷ 0.06 =</a:t>
+              <a:t>)  7,8 ÷ 0,06 =</a:t>
             </a:r>
           </a:p>
         </p:txBody>
@@ -9949,7 +9949,7 @@
             </a:r>
             <a:r>
               <a:rPr lang="en-GB" sz="1400" dirty="0"/>
-              <a:t>)  3 ÷ 0.12 =</a:t>
+              <a:t>)  3 ÷ 0,12 =</a:t>
             </a:r>
           </a:p>
         </p:txBody>
@@ -10127,7 +10127,7 @@
             </a:r>
             <a:r>
               <a:rPr lang="en-GB" sz="1400" dirty="0"/>
-              <a:t>)  6.48 ÷ 0.27 =</a:t>
+              <a:t>)  6,48 ÷ 0,27 =</a:t>
             </a:r>
           </a:p>
         </p:txBody>
@@ -10305,7 +10305,7 @@
             </a:r>
             <a:r>
               <a:rPr lang="en-GB" sz="1400" dirty="0"/>
-              <a:t>)  4 ÷ 0.02 =</a:t>
+              <a:t>)  4 ÷ 0,02 =</a:t>
             </a:r>
           </a:p>
         </p:txBody>
@@ -10646,7 +10646,7 @@
             </a:r>
             <a:r>
               <a:rPr lang="en-GB" sz="1400" dirty="0"/>
-              <a:t>)  2.1 ÷ 0.3 =</a:t>
+              <a:t>)  2,1 ÷ 0,3 =</a:t>
             </a:r>
           </a:p>
         </p:txBody>
@@ -10896,7 +10896,7 @@
           <a:p>
             <a:r>
               <a:rPr lang="en-GB" sz="1400" dirty="0"/>
-              <a:t>2.7 ÷ 0.9 =</a:t>
+              <a:t>2,7 ÷ 0,9 =</a:t>
             </a:r>
           </a:p>
         </p:txBody>
@@ -11181,7 +11181,7 @@
           <a:p>
             <a:r>
               <a:rPr lang="en-GB" sz="1400" dirty="0"/>
-              <a:t>0.84 ÷ 0.12 =</a:t>
+              <a:t>0,84 ÷ 0,12 =</a:t>
             </a:r>
           </a:p>
         </p:txBody>
@@ -11400,7 +11400,7 @@
             </a:r>
             <a:r>
               <a:rPr lang="en-GB" sz="1400" dirty="0"/>
-              <a:t>)  3.6 ÷ 0.4 =</a:t>
+              <a:t>)  3,6 ÷ 0,4 =</a:t>
             </a:r>
           </a:p>
         </p:txBody>
@@ -11584,7 +11584,7 @@
             </a:r>
             <a:r>
               <a:rPr lang="en-GB" sz="1400" dirty="0"/>
-              <a:t>)  7.8 ÷ 0.6 =</a:t>
+              <a:t>)  7,8 ÷ 0,6 =</a:t>
             </a:r>
           </a:p>
         </p:txBody>
@@ -11686,7 +11686,7 @@
             </a:r>
             <a:r>
               <a:rPr lang="en-GB" sz="1400" dirty="0"/>
-              <a:t>)  0.36 ÷ 0.09 =</a:t>
+              <a:t>)  0,36 ÷ 0,09 =</a:t>
             </a:r>
           </a:p>
         </p:txBody>
@@ -11870,7 +11870,7 @@
             </a:r>
             <a:r>
               <a:rPr lang="en-GB" sz="1400" dirty="0"/>
-              <a:t>)  0.56 ÷ 0.07 =</a:t>
+              <a:t>)  0,56 ÷ 0,07 =</a:t>
             </a:r>
           </a:p>
         </p:txBody>
@@ -12054,7 +12054,7 @@
             </a:r>
             <a:r>
               <a:rPr lang="en-GB" sz="1400" dirty="0"/>
-              <a:t>)  0.48 ÷ 0.08 =</a:t>
+              <a:t>)  0,48 ÷ 0,08 =</a:t>
             </a:r>
           </a:p>
         </p:txBody>
@@ -12156,7 +12156,7 @@
             </a:r>
             <a:r>
               <a:rPr lang="en-GB" sz="1400" dirty="0"/>
-              <a:t>)  3.6 ÷ 1.2 =</a:t>
+              <a:t>)  3,6 ÷ 1,2 =</a:t>
             </a:r>
           </a:p>
         </p:txBody>
@@ -12258,7 +12258,7 @@
             </a:r>
             <a:r>
               <a:rPr lang="en-GB" sz="1400" dirty="0"/>
-              <a:t>)  12.1 ÷ 1.1 =</a:t>
+              <a:t>)  12,1 ÷ 1,1 =</a:t>
             </a:r>
           </a:p>
         </p:txBody>
@@ -12360,7 +12360,7 @@
             </a:r>
             <a:r>
               <a:rPr lang="en-GB" sz="1400" dirty="0"/>
-              <a:t>)  0.54 ÷ 0.06 =</a:t>
+              <a:t>)  0,54 ÷ 0,06 =</a:t>
             </a:r>
           </a:p>
         </p:txBody>
@@ -12399,7 +12399,7 @@
             </a:r>
             <a:r>
               <a:rPr lang="en-GB" sz="1400" dirty="0"/>
-              <a:t>)  0.72 ÷ 0.12 =</a:t>
+              <a:t>)  0,72 ÷ 0,12 =</a:t>
             </a:r>
           </a:p>
         </p:txBody>
@@ -12438,7 +12438,7 @@
             </a:r>
             <a:r>
               <a:rPr lang="en-GB" sz="1400" dirty="0"/>
-              <a:t>)  27.3 ÷ 1.3 =</a:t>
+              <a:t>)  27,3 ÷ 1,3 =</a:t>
             </a:r>
           </a:p>
         </p:txBody>
@@ -12477,7 +12477,7 @@
             </a:r>
             <a:r>
               <a:rPr lang="en-GB" sz="1400" dirty="0"/>
-              <a:t>)  24.6 ÷ 0.6 =</a:t>
+              <a:t>)  24,6 ÷ 0,6 =</a:t>
             </a:r>
           </a:p>
         </p:txBody>
@@ -12516,7 +12516,7 @@
             </a:r>
             <a:r>
               <a:rPr lang="en-GB" sz="1400" dirty="0"/>
-              <a:t>)  4.48 ÷ 0.14 =</a:t>
+              <a:t>)  4,48 ÷ 0,14 =</a:t>
             </a:r>
           </a:p>
         </p:txBody>
@@ -12555,7 +12555,7 @@
             </a:r>
             <a:r>
               <a:rPr lang="en-GB" sz="1400" dirty="0"/>
-              <a:t>)  48.6 ÷ 0.9 =</a:t>
+              <a:t>)  48,6 ÷ 0,9 =</a:t>
             </a:r>
           </a:p>
         </p:txBody>
@@ -12594,7 +12594,7 @@
             </a:r>
             <a:r>
               <a:rPr lang="en-GB" sz="1400" dirty="0"/>
-              <a:t>)  67.2 ÷ 2.8 =</a:t>
+              <a:t>)  67,2 ÷ 2,8 =</a:t>
             </a:r>
           </a:p>
         </p:txBody>
@@ -12633,7 +12633,7 @@
             </a:r>
             <a:r>
               <a:rPr lang="en-GB" sz="1400" dirty="0"/>
-              <a:t>)  1.47 ÷ 0.21 =</a:t>
+              <a:t>)  1,47 ÷ 0,21 =</a:t>
             </a:r>
           </a:p>
         </p:txBody>
@@ -12711,7 +12711,7 @@
             </a:r>
             <a:r>
               <a:rPr lang="en-GB" sz="1400" dirty="0"/>
-              <a:t>)  2 ÷ 0.8 =</a:t>
+              <a:t>)  2 ÷ 0,8 =</a:t>
             </a:r>
           </a:p>
         </p:txBody>
@@ -12750,7 +12750,7 @@
             </a:r>
             <a:r>
               <a:rPr lang="en-GB" sz="1400" dirty="0"/>
-              <a:t>)  0.54 ÷ 0.12 =</a:t>
+              <a:t>)  0,54 ÷ 0,12 =</a:t>
             </a:r>
           </a:p>
         </p:txBody>
@@ -12789,7 +12789,7 @@
             </a:r>
             <a:r>
               <a:rPr lang="en-GB" sz="1400" dirty="0"/>
-              <a:t>)  11.9 ÷ 1.4 =</a:t>
+              <a:t>)  11,9 ÷ 1,4 =</a:t>
             </a:r>
           </a:p>
         </p:txBody>
@@ -12828,7 +12828,7 @@
             </a:r>
             <a:r>
               <a:rPr lang="en-GB" sz="1400" dirty="0"/>
-              <a:t>)  1.95 ÷ 0.06 =</a:t>
+              <a:t>)  1,95 ÷ 0,06 =</a:t>
             </a:r>
           </a:p>
         </p:txBody>
@@ -12867,7 +12867,7 @@
             </a:r>
             <a:r>
               <a:rPr lang="en-GB" sz="1400" dirty="0"/>
-              <a:t>)  61.2 ÷ 2.4 =</a:t>
+              <a:t>)  61,2 ÷ 2,4 =</a:t>
             </a:r>
           </a:p>
         </p:txBody>
@@ -12906,7 +12906,7 @@
             </a:r>
             <a:r>
               <a:rPr lang="en-GB" sz="1400" dirty="0"/>
-              <a:t>)  4.27 ÷ 0.35 =</a:t>
+              <a:t>)  4,27 ÷ 0,35 =</a:t>
             </a:r>
           </a:p>
         </p:txBody>
@@ -13063,7 +13063,7 @@
             </a:r>
             <a:r>
               <a:rPr lang="en-GB" sz="1400" dirty="0"/>
-              <a:t>)  2.1 ÷ 0.3 =</a:t>
+              <a:t>)  2,1 ÷ 0,3 =</a:t>
             </a:r>
           </a:p>
         </p:txBody>
@@ -13391,7 +13391,7 @@
           <a:p>
             <a:r>
               <a:rPr lang="en-GB" sz="1400" dirty="0"/>
-              <a:t>2.7 ÷ 0.9 =</a:t>
+              <a:t>2,7 ÷ 0,9 =</a:t>
             </a:r>
           </a:p>
         </p:txBody>
@@ -13719,7 +13719,7 @@
           <a:p>
             <a:r>
               <a:rPr lang="en-GB" sz="1400" dirty="0"/>
-              <a:t>0.84 ÷ 0.12 =</a:t>
+              <a:t>0,84 ÷ 0,12 =</a:t>
             </a:r>
           </a:p>
         </p:txBody>
@@ -13981,7 +13981,7 @@
             </a:r>
             <a:r>
               <a:rPr lang="en-GB" sz="1400" dirty="0"/>
-              <a:t>)  3.6 ÷ 0.4 =</a:t>
+              <a:t>)  3,6 ÷ 0,4 =</a:t>
             </a:r>
           </a:p>
         </p:txBody>
@@ -14243,7 +14243,7 @@
             </a:r>
             <a:r>
               <a:rPr lang="en-GB" sz="1400" dirty="0"/>
-              <a:t>)  7.8 ÷ 0.6 =</a:t>
+              <a:t>)  7,8 ÷ 0,6 =</a:t>
             </a:r>
           </a:p>
         </p:txBody>
@@ -14423,7 +14423,7 @@
             </a:r>
             <a:r>
               <a:rPr lang="en-GB" sz="1400" dirty="0"/>
-              <a:t>)  0.36 ÷ 0.09 =</a:t>
+              <a:t>)  0,36 ÷ 0,09 =</a:t>
             </a:r>
           </a:p>
         </p:txBody>
@@ -14685,7 +14685,7 @@
             </a:r>
             <a:r>
               <a:rPr lang="en-GB" sz="1400" dirty="0"/>
-              <a:t>)  0.56 ÷ 0.07 =</a:t>
+              <a:t>)  0,56 ÷ 0,07 =</a:t>
             </a:r>
           </a:p>
         </p:txBody>
@@ -14947,7 +14947,7 @@
             </a:r>
             <a:r>
               <a:rPr lang="en-GB" sz="1400" dirty="0"/>
-              <a:t>)  0.48 ÷ 0.08 =</a:t>
+              <a:t>)  0,48 ÷ 0,08 =</a:t>
             </a:r>
           </a:p>
         </p:txBody>
@@ -15127,7 +15127,7 @@
             </a:r>
             <a:r>
               <a:rPr lang="en-GB" sz="1400" dirty="0"/>
-              <a:t>)  3.6 ÷ 1.2 =</a:t>
+              <a:t>)  3,6 ÷ 1,2 =</a:t>
             </a:r>
           </a:p>
         </p:txBody>
@@ -15307,7 +15307,7 @@
             </a:r>
             <a:r>
               <a:rPr lang="en-GB" sz="1400" dirty="0"/>
-              <a:t>)  12.1 ÷ 1.1 =</a:t>
+              <a:t>)  12,1 ÷ 1,1 =</a:t>
             </a:r>
           </a:p>
         </p:txBody>
@@ -15487,7 +15487,7 @@
             </a:r>
             <a:r>
               <a:rPr lang="en-GB" sz="1400" dirty="0"/>
-              <a:t>)  0.54 ÷ 0.06 =</a:t>
+              <a:t>)  0,54 ÷ 0,06 =</a:t>
             </a:r>
           </a:p>
         </p:txBody>
@@ -15665,7 +15665,7 @@
             </a:r>
             <a:r>
               <a:rPr lang="en-GB" sz="1400" dirty="0"/>
-              <a:t>)  0.72 ÷ 0.12 =</a:t>
+              <a:t>)  0,72 ÷ 0,12 =</a:t>
             </a:r>
           </a:p>
         </p:txBody>
@@ -15843,7 +15843,7 @@
             </a:r>
             <a:r>
               <a:rPr lang="en-GB" sz="1400" dirty="0"/>
-              <a:t>)  27.3 ÷ 1.3 =</a:t>
+              <a:t>)  27,3 ÷ 1,3 =</a:t>
             </a:r>
           </a:p>
         </p:txBody>
@@ -16021,7 +16021,7 @@
             </a:r>
             <a:r>
               <a:rPr lang="en-GB" sz="1400" dirty="0"/>
-              <a:t>)  24.6 ÷ 0.6 =</a:t>
+              <a:t>)  24,6 ÷ 0,6 =</a:t>
             </a:r>
           </a:p>
         </p:txBody>
@@ -16199,7 +16199,7 @@
             </a:r>
             <a:r>
               <a:rPr lang="en-GB" sz="1400" dirty="0"/>
-              <a:t>)  4.48 ÷ 0.14 =</a:t>
+              <a:t>)  4,48 ÷ 0,14 =</a:t>
             </a:r>
           </a:p>
         </p:txBody>
@@ -16377,7 +16377,7 @@
             </a:r>
             <a:r>
               <a:rPr lang="en-GB" sz="1400" dirty="0"/>
-              <a:t>)  48.6 ÷ 0.9 =</a:t>
+              <a:t>)  48,6 ÷ 0,9 =</a:t>
             </a:r>
           </a:p>
         </p:txBody>
@@ -16555,7 +16555,7 @@
             </a:r>
             <a:r>
               <a:rPr lang="en-GB" sz="1400" dirty="0"/>
-              <a:t>)  67.2 ÷ 2.8 =</a:t>
+              <a:t>)  67,2 ÷ 2,8 =</a:t>
             </a:r>
           </a:p>
         </p:txBody>
@@ -16733,7 +16733,7 @@
             </a:r>
             <a:r>
               <a:rPr lang="en-GB" sz="1400" dirty="0"/>
-              <a:t>)  1.47 ÷ 0.21 =</a:t>
+              <a:t>)  1,47 ÷ 0,21 =</a:t>
             </a:r>
           </a:p>
         </p:txBody>
@@ -16954,7 +16954,7 @@
             <a:pPr algn="ctr"/>
             <a:r>
               <a:rPr lang="en-GB" dirty="0"/>
-              <a:t>1.5</a:t>
+              <a:t>1,5</a:t>
             </a:r>
           </a:p>
         </p:txBody>
@@ -16993,7 +16993,7 @@
             </a:r>
             <a:r>
               <a:rPr lang="en-GB" sz="1400" dirty="0"/>
-              <a:t>)  2 ÷ 0.8 =</a:t>
+              <a:t>)  2 ÷ 0,8 =</a:t>
             </a:r>
           </a:p>
         </p:txBody>
@@ -17132,7 +17132,7 @@
             <a:pPr algn="ctr"/>
             <a:r>
               <a:rPr lang="en-GB" dirty="0"/>
-              <a:t>2.5</a:t>
+              <a:t>2,5</a:t>
             </a:r>
           </a:p>
         </p:txBody>
@@ -17171,7 +17171,7 @@
             </a:r>
             <a:r>
               <a:rPr lang="en-GB" sz="1400" dirty="0"/>
-              <a:t>)  0.54 ÷ 0.12 =</a:t>
+              <a:t>)  0,54 ÷ 0,12 =</a:t>
             </a:r>
           </a:p>
         </p:txBody>
@@ -17249,7 +17249,7 @@
             <a:pPr algn="ctr"/>
             <a:r>
               <a:rPr lang="en-GB" dirty="0"/>
-              <a:t>4.5</a:t>
+              <a:t>4,5</a:t>
             </a:r>
           </a:p>
         </p:txBody>
@@ -17349,7 +17349,7 @@
             </a:r>
             <a:r>
               <a:rPr lang="en-GB" sz="1400" dirty="0"/>
-              <a:t>)  11.9 ÷ 1.4 =</a:t>
+              <a:t>)  11,9 ÷ 1,4 =</a:t>
             </a:r>
           </a:p>
         </p:txBody>
@@ -17427,7 +17427,7 @@
             <a:pPr algn="ctr"/>
             <a:r>
               <a:rPr lang="en-GB" dirty="0"/>
-              <a:t>8.5</a:t>
+              <a:t>8,5</a:t>
             </a:r>
           </a:p>
         </p:txBody>
@@ -17527,7 +17527,7 @@
             </a:r>
             <a:r>
               <a:rPr lang="en-GB" sz="1400" dirty="0"/>
-              <a:t>)  1.95 ÷ 0.06 =</a:t>
+              <a:t>)  1,95 ÷ 0,06 =</a:t>
             </a:r>
           </a:p>
         </p:txBody>
@@ -17666,7 +17666,7 @@
             <a:pPr algn="ctr"/>
             <a:r>
               <a:rPr lang="en-GB" dirty="0"/>
-              <a:t>32.5</a:t>
+              <a:t>32,5</a:t>
             </a:r>
           </a:p>
         </p:txBody>
@@ -17705,7 +17705,7 @@
             </a:r>
             <a:r>
               <a:rPr lang="en-GB" sz="1400" dirty="0"/>
-              <a:t>)  61.2 ÷ 2.4 =</a:t>
+              <a:t>)  61,2 ÷ 2,4 =</a:t>
             </a:r>
           </a:p>
         </p:txBody>
@@ -17844,7 +17844,7 @@
             <a:pPr algn="ctr"/>
             <a:r>
               <a:rPr lang="en-GB" dirty="0"/>
-              <a:t>25.5</a:t>
+              <a:t>25,5</a:t>
             </a:r>
           </a:p>
         </p:txBody>
@@ -17883,7 +17883,7 @@
             </a:r>
             <a:r>
               <a:rPr lang="en-GB" sz="1400" dirty="0"/>
-              <a:t>)  4.27 ÷ 0.35 =</a:t>
+              <a:t>)  4,27 ÷ 0,35 =</a:t>
             </a:r>
           </a:p>
         </p:txBody>
@@ -18022,7 +18022,7 @@
             <a:pPr algn="ctr"/>
             <a:r>
               <a:rPr lang="en-GB" dirty="0"/>
-              <a:t>12.2</a:t>
+              <a:t>12,2</a:t>
             </a:r>
           </a:p>
         </p:txBody>
